--- a/system/wk08poster.pptx
+++ b/system/wk08poster.pptx
@@ -236,7 +236,7 @@
           <a:p>
             <a:fld id="{8DAC81C5-AE7A-1044-93C2-6BFF0DD7BC2B}" type="datetimeFigureOut">
               <a:rPr lang="en-US" smtClean="0"/>
-              <a:t>3/9/2026</a:t>
+              <a:t>4/13/2026</a:t>
             </a:fld>
             <a:endParaRPr lang="en-US"/>
           </a:p>
@@ -402,7 +402,7 @@
           <a:p>
             <a:fld id="{8CBB8FA7-5BDC-BF4F-AE27-E2122A3D7D4C}" type="datetimeFigureOut">
               <a:rPr lang="en-US" smtClean="0"/>
-              <a:t>3/9/2026</a:t>
+              <a:t>4/13/2026</a:t>
             </a:fld>
             <a:endParaRPr lang="en-US"/>
           </a:p>
@@ -1349,6 +1349,28 @@
                 <a:spcPct val="50000"/>
               </a:spcBef>
             </a:pPr>
+            <a:endParaRPr lang="en-US" sz="4000" dirty="0">
+              <a:latin typeface="ITC Franklin Gothic Std Bk Cd"/>
+              <a:cs typeface="ITC Franklin Gothic Std Bk Cd"/>
+            </a:endParaRPr>
+          </a:p>
+          <a:p>
+            <a:pPr>
+              <a:spcBef>
+                <a:spcPct val="50000"/>
+              </a:spcBef>
+            </a:pPr>
+            <a:endParaRPr lang="en-US" sz="4000" dirty="0">
+              <a:latin typeface="ITC Franklin Gothic Std Bk Cd"/>
+              <a:cs typeface="ITC Franklin Gothic Std Bk Cd"/>
+            </a:endParaRPr>
+          </a:p>
+          <a:p>
+            <a:pPr>
+              <a:spcBef>
+                <a:spcPct val="50000"/>
+              </a:spcBef>
+            </a:pPr>
             <a:r>
               <a:rPr lang="en-US" sz="4000" dirty="0">
                 <a:latin typeface="ITC Franklin Gothic Std Bk Cd"/>
@@ -1547,79 +1569,8 @@
                 <a:latin typeface="-apple-system"/>
                 <a:cs typeface="Georgia" charset="0"/>
               </a:rPr>
-              <a:t>Each of our PCB includes a stacking header, a </a:t>
+              <a:t>We are using the PCB we designed last semester in our hardware production course, to make all our sensors work, we are using two QWICC ports, UART connection through the GPIO pins on the raspberry pi and a PWM signal through the GPIO pins. For our project, instead of designing a new PCB, we decided to stack to break out boards on top of each other, plus the sense hat, this helped us save time and allocate that time that we would have used into other aspects of the project such as the case, since we decided to reprint one from the ground up.</a:t>
             </a:r>
-            <a:r>
-              <a:rPr lang="en-US" sz="4400" dirty="0" err="1">
-                <a:latin typeface="-apple-system"/>
-                <a:cs typeface="Georgia" charset="0"/>
-              </a:rPr>
-              <a:t>qwicc</a:t>
-            </a:r>
-            <a:r>
-              <a:rPr lang="en-US" sz="4400" dirty="0">
-                <a:latin typeface="-apple-system"/>
-                <a:cs typeface="Georgia" charset="0"/>
-              </a:rPr>
-              <a:t> connector, two resistors and two LEDS.</a:t>
-            </a:r>
-          </a:p>
-          <a:p>
-            <a:r>
-              <a:rPr lang="en-US" sz="4400" dirty="0">
-                <a:latin typeface="-apple-system"/>
-                <a:cs typeface="Georgia" charset="0"/>
-              </a:rPr>
-              <a:t>We have decided to use two PCBs for our project stacking on top of a pi. One </a:t>
-            </a:r>
-            <a:r>
-              <a:rPr lang="en-US" sz="4400" dirty="0" err="1">
-                <a:latin typeface="-apple-system"/>
-                <a:cs typeface="Georgia" charset="0"/>
-              </a:rPr>
-              <a:t>pcb</a:t>
-            </a:r>
-            <a:r>
-              <a:rPr lang="en-US" sz="4400" dirty="0">
-                <a:latin typeface="-apple-system"/>
-                <a:cs typeface="Georgia" charset="0"/>
-              </a:rPr>
-              <a:t> will be attached with buzzer and fingerprint, the other </a:t>
-            </a:r>
-            <a:r>
-              <a:rPr lang="en-US" sz="4400" dirty="0" err="1">
-                <a:latin typeface="-apple-system"/>
-                <a:cs typeface="Georgia" charset="0"/>
-              </a:rPr>
-              <a:t>pcb</a:t>
-            </a:r>
-            <a:r>
-              <a:rPr lang="en-US" sz="4400" dirty="0">
-                <a:latin typeface="-apple-system"/>
-                <a:cs typeface="Georgia" charset="0"/>
-              </a:rPr>
-              <a:t> will be attached with </a:t>
-            </a:r>
-            <a:r>
-              <a:rPr lang="en-US" sz="4400" dirty="0" err="1">
-                <a:latin typeface="-apple-system"/>
-                <a:cs typeface="Georgia" charset="0"/>
-              </a:rPr>
-              <a:t>Oled</a:t>
-            </a:r>
-            <a:r>
-              <a:rPr lang="en-US" sz="4400" dirty="0">
-                <a:latin typeface="-apple-system"/>
-                <a:cs typeface="Georgia" charset="0"/>
-              </a:rPr>
-              <a:t> display and servo.</a:t>
-            </a:r>
-          </a:p>
-          <a:p>
-            <a:endParaRPr lang="en-US" sz="4400" dirty="0">
-              <a:latin typeface="-apple-system"/>
-              <a:cs typeface="Georgia" charset="0"/>
-            </a:endParaRPr>
           </a:p>
           <a:p>
             <a:endParaRPr lang="en-US" sz="4400" dirty="0">
@@ -1701,21 +1652,7 @@
                 <a:latin typeface="-apple-system"/>
                 <a:cs typeface="ITC Franklin Gothic Std Bk Cd"/>
               </a:rPr>
-              <a:t>Employers can see when the employees ‘ </a:t>
-            </a:r>
-            <a:r>
-              <a:rPr lang="en-US" sz="4400" dirty="0" err="1">
-                <a:latin typeface="-apple-system"/>
-                <a:cs typeface="ITC Franklin Gothic Std Bk Cd"/>
-              </a:rPr>
-              <a:t>punchlogs</a:t>
-            </a:r>
-            <a:r>
-              <a:rPr lang="en-US" sz="4400" dirty="0">
-                <a:latin typeface="-apple-system"/>
-                <a:cs typeface="ITC Franklin Gothic Std Bk Cd"/>
-              </a:rPr>
-              <a:t> in the app. Employers also can add more jobs in the job board. Employee can clock in and clock out using fingerprint scanner.</a:t>
+              <a:t>Employers can see when the employees punch logs in the app. Employers also can add more jobs in the job board. Employee can clock in and clock out using fingerprint scanner.</a:t>
             </a:r>
           </a:p>
           <a:p>
@@ -1757,19 +1694,8 @@
                 <a:latin typeface="-apple-system"/>
                 <a:cs typeface="ITC Franklin Gothic Std Bk Cd"/>
               </a:rPr>
-              <a:t>Our app has 3 tabs such as home, job and </a:t>
+              <a:t>Our app has 3 tabs such as home, job and punch logs</a:t>
             </a:r>
-            <a:r>
-              <a:rPr lang="en-US" sz="4400" dirty="0" err="1">
-                <a:latin typeface="-apple-system"/>
-                <a:cs typeface="ITC Franklin Gothic Std Bk Cd"/>
-              </a:rPr>
-              <a:t>punchlogs</a:t>
-            </a:r>
-            <a:endParaRPr lang="en-US" sz="4400" dirty="0">
-              <a:latin typeface="-apple-system"/>
-              <a:cs typeface="ITC Franklin Gothic Std Bk Cd"/>
-            </a:endParaRPr>
           </a:p>
           <a:p>
             <a:pPr>
@@ -1877,7 +1803,7 @@
         </p:nvSpPr>
         <p:spPr bwMode="auto">
           <a:xfrm>
-            <a:off x="32701026" y="17069990"/>
+            <a:off x="32701026" y="16895325"/>
             <a:ext cx="9829800" cy="7237810"/>
           </a:xfrm>
           <a:prstGeom prst="rect">
@@ -1923,24 +1849,12 @@
             </a:r>
           </a:p>
           <a:p>
-            <a:endParaRPr lang="en-US" sz="2800" dirty="0">
-              <a:latin typeface="ITC Franklin Gothic Std Bk Cd"/>
-            </a:endParaRPr>
-          </a:p>
-          <a:p>
-            <a:r>
-              <a:rPr lang="en-US" sz="4400" dirty="0" err="1">
-                <a:latin typeface="-apple-system"/>
-                <a:cs typeface="Georgia" charset="0"/>
-              </a:rPr>
-              <a:t>Alll</a:t>
-            </a:r>
             <a:r>
               <a:rPr lang="en-US" sz="4400" dirty="0">
                 <a:latin typeface="-apple-system"/>
                 <a:cs typeface="Georgia" charset="0"/>
               </a:rPr>
-              <a:t> of our sensors are working properly. Our future goal for now is to test how they work with each other after assembling,</a:t>
+              <a:t>All of our sensors are working properly. Our future goal for now is to fix some of the old code from our mobile application, to take into account the new changes we had to make to our database, and think about adding authentication to our clock in and clock out process and when users create an account </a:t>
             </a:r>
           </a:p>
         </p:txBody>
@@ -2002,17 +1916,17 @@
                 <a:latin typeface="ITC Franklin Gothic Std Bk Cd"/>
                 <a:cs typeface="ITC Franklin Gothic Std Bk Cd"/>
               </a:rPr>
-              <a:t>Professors, etc.</a:t>
+              <a:t>Professors, parts crib, Digi key, Humber technologist.</a:t>
             </a:r>
           </a:p>
         </p:txBody>
       </p:sp>
       <p:pic>
         <p:nvPicPr>
-          <p:cNvPr id="11" name="Picture 10">
+          <p:cNvPr id="13" name="Picture 12" descr="A computer with wires and a rectangular object with a purple light&#10;&#10;AI-generated content may be incorrect.">
             <a:extLst>
               <a:ext uri="{FF2B5EF4-FFF2-40B4-BE49-F238E27FC236}">
-                <a16:creationId xmlns:a16="http://schemas.microsoft.com/office/drawing/2014/main" id="{C2E91003-5BA7-0EB1-F526-6265D08FB5B1}"/>
+                <a16:creationId xmlns:a16="http://schemas.microsoft.com/office/drawing/2014/main" id="{DAEE289B-D24B-D375-5FD5-3F62C2A9F84F}"/>
               </a:ext>
             </a:extLst>
           </p:cNvPr>
@@ -2023,14 +1937,13 @@
         </p:nvPicPr>
         <p:blipFill>
           <a:blip r:embed="rId3"/>
-          <a:stretch>
-            <a:fillRect/>
-          </a:stretch>
+          <a:srcRect l="25904"/>
+          <a:stretch/>
         </p:blipFill>
         <p:spPr>
-          <a:xfrm>
-            <a:off x="33107199" y="5383851"/>
-            <a:ext cx="9423627" cy="10291577"/>
+          <a:xfrm rot="5400000">
+            <a:off x="13403171" y="23339796"/>
+            <a:ext cx="6493058" cy="9182528"/>
           </a:xfrm>
           <a:prstGeom prst="rect">
             <a:avLst/>
@@ -2039,10 +1952,10 @@
       </p:pic>
       <p:pic>
         <p:nvPicPr>
-          <p:cNvPr id="12" name="Picture 11">
+          <p:cNvPr id="17" name="Picture 16" descr="A screenshot of a computer&#10;&#10;AI-generated content may be incorrect.">
             <a:extLst>
               <a:ext uri="{FF2B5EF4-FFF2-40B4-BE49-F238E27FC236}">
-                <a16:creationId xmlns:a16="http://schemas.microsoft.com/office/drawing/2014/main" id="{E4B3A2DE-99A3-B0CE-CADD-F65C7D2ECA76}"/>
+                <a16:creationId xmlns:a16="http://schemas.microsoft.com/office/drawing/2014/main" id="{15D85E2C-D418-2BF5-F73B-E384EDFB8F7F}"/>
               </a:ext>
             </a:extLst>
           </p:cNvPr>
@@ -2059,20 +1972,66 @@
         </p:blipFill>
         <p:spPr>
           <a:xfrm>
-            <a:off x="1360374" y="21396707"/>
-            <a:ext cx="9612426" cy="4863505"/>
+            <a:off x="33116737" y="4959507"/>
+            <a:ext cx="9433125" cy="7156293"/>
           </a:xfrm>
           <a:prstGeom prst="rect">
             <a:avLst/>
           </a:prstGeom>
         </p:spPr>
       </p:pic>
+      <p:sp>
+        <p:nvSpPr>
+          <p:cNvPr id="19" name="TextBox 18">
+            <a:extLst>
+              <a:ext uri="{FF2B5EF4-FFF2-40B4-BE49-F238E27FC236}">
+                <a16:creationId xmlns:a16="http://schemas.microsoft.com/office/drawing/2014/main" id="{96FFD5A0-30F1-53E5-E426-9162DC1CE392}"/>
+              </a:ext>
+            </a:extLst>
+          </p:cNvPr>
+          <p:cNvSpPr txBox="1"/>
+          <p:nvPr/>
+        </p:nvSpPr>
+        <p:spPr>
+          <a:xfrm>
+            <a:off x="33803533" y="11841480"/>
+            <a:ext cx="8045246" cy="3416320"/>
+          </a:xfrm>
+          <a:prstGeom prst="rect">
+            <a:avLst/>
+          </a:prstGeom>
+          <a:noFill/>
+        </p:spPr>
+        <p:txBody>
+          <a:bodyPr wrap="square">
+            <a:spAutoFit/>
+          </a:bodyPr>
+          <a:lstStyle/>
+          <a:p>
+            <a:pPr>
+              <a:spcBef>
+                <a:spcPct val="50000"/>
+              </a:spcBef>
+            </a:pPr>
+            <a:r>
+              <a:rPr lang="en-US" sz="3600" dirty="0">
+                <a:latin typeface="ITC Franklin Gothic Std Bk Cd"/>
+                <a:cs typeface="ITC Franklin Gothic Std Bk Cd"/>
+              </a:rPr>
+              <a:t>Our Punch System, takes the fingerprint data collected at clock in and clock out, and stores that with the associated used to make sure the correct person is clocking in and clocking out at the job site, to help protect against time fraud.</a:t>
+            </a:r>
+            <a:endParaRPr lang="en-US" sz="3600" dirty="0">
+              <a:latin typeface="ITC Franklin Gothic Std Bk Cd"/>
+            </a:endParaRPr>
+          </a:p>
+        </p:txBody>
+      </p:sp>
       <p:pic>
         <p:nvPicPr>
-          <p:cNvPr id="14" name="Picture 13">
+          <p:cNvPr id="21" name="Picture 20" descr="A group of green squares&#10;&#10;AI-generated content may be incorrect.">
             <a:extLst>
               <a:ext uri="{FF2B5EF4-FFF2-40B4-BE49-F238E27FC236}">
-                <a16:creationId xmlns:a16="http://schemas.microsoft.com/office/drawing/2014/main" id="{60BBD813-CC37-C32B-09C8-C52CD1FD7387}"/>
+                <a16:creationId xmlns:a16="http://schemas.microsoft.com/office/drawing/2014/main" id="{68164F35-6D4D-454D-0F45-107937FB0AC2}"/>
               </a:ext>
             </a:extLst>
           </p:cNvPr>
@@ -2089,8 +2048,8 @@
         </p:blipFill>
         <p:spPr>
           <a:xfrm>
-            <a:off x="23412236" y="14293516"/>
-            <a:ext cx="7658527" cy="16884073"/>
+            <a:off x="1653239" y="21706054"/>
+            <a:ext cx="8670632" cy="5595630"/>
           </a:xfrm>
           <a:prstGeom prst="rect">
             <a:avLst/>
@@ -2099,10 +2058,10 @@
       </p:pic>
       <p:pic>
         <p:nvPicPr>
-          <p:cNvPr id="16" name="Picture 15">
+          <p:cNvPr id="23" name="Picture 22" descr="A screenshot of a phone&#10;&#10;AI-generated content may be incorrect.">
             <a:extLst>
               <a:ext uri="{FF2B5EF4-FFF2-40B4-BE49-F238E27FC236}">
-                <a16:creationId xmlns:a16="http://schemas.microsoft.com/office/drawing/2014/main" id="{666620EF-3FFC-C448-88FA-01DF0030C6CD}"/>
+                <a16:creationId xmlns:a16="http://schemas.microsoft.com/office/drawing/2014/main" id="{9B84D05F-9485-FE3D-F86F-1687238D648E}"/>
               </a:ext>
             </a:extLst>
           </p:cNvPr>
@@ -2119,8 +2078,68 @@
         </p:blipFill>
         <p:spPr>
           <a:xfrm>
-            <a:off x="12316815" y="12185346"/>
-            <a:ext cx="8665769" cy="8547708"/>
+            <a:off x="23265438" y="14221667"/>
+            <a:ext cx="7647182" cy="16955922"/>
+          </a:xfrm>
+          <a:prstGeom prst="rect">
+            <a:avLst/>
+          </a:prstGeom>
+        </p:spPr>
+      </p:pic>
+      <p:pic>
+        <p:nvPicPr>
+          <p:cNvPr id="11" name="Picture 10">
+            <a:extLst>
+              <a:ext uri="{FF2B5EF4-FFF2-40B4-BE49-F238E27FC236}">
+                <a16:creationId xmlns:a16="http://schemas.microsoft.com/office/drawing/2014/main" id="{D7B3A227-BAFF-4E29-CAA7-B962F7143F73}"/>
+              </a:ext>
+            </a:extLst>
+          </p:cNvPr>
+          <p:cNvPicPr>
+            <a:picLocks noChangeAspect="1"/>
+          </p:cNvPicPr>
+          <p:nvPr/>
+        </p:nvPicPr>
+        <p:blipFill>
+          <a:blip r:embed="rId7"/>
+          <a:stretch>
+            <a:fillRect/>
+          </a:stretch>
+        </p:blipFill>
+        <p:spPr>
+          <a:xfrm>
+            <a:off x="2042421" y="11407633"/>
+            <a:ext cx="7741659" cy="7700333"/>
+          </a:xfrm>
+          <a:prstGeom prst="rect">
+            <a:avLst/>
+          </a:prstGeom>
+        </p:spPr>
+      </p:pic>
+      <p:pic>
+        <p:nvPicPr>
+          <p:cNvPr id="14" name="Picture 13">
+            <a:extLst>
+              <a:ext uri="{FF2B5EF4-FFF2-40B4-BE49-F238E27FC236}">
+                <a16:creationId xmlns:a16="http://schemas.microsoft.com/office/drawing/2014/main" id="{FC3FE784-E907-ED49-27AC-359844548198}"/>
+              </a:ext>
+            </a:extLst>
+          </p:cNvPr>
+          <p:cNvPicPr>
+            <a:picLocks noChangeAspect="1"/>
+          </p:cNvPicPr>
+          <p:nvPr/>
+        </p:nvPicPr>
+        <p:blipFill>
+          <a:blip r:embed="rId8"/>
+          <a:stretch>
+            <a:fillRect/>
+          </a:stretch>
+        </p:blipFill>
+        <p:spPr>
+          <a:xfrm>
+            <a:off x="12176760" y="16196135"/>
+            <a:ext cx="8906060" cy="7633766"/>
           </a:xfrm>
           <a:prstGeom prst="rect">
             <a:avLst/>
